--- a/presentation/발표ppt(최종).pptx
+++ b/presentation/발표ppt(최종).pptx
@@ -12176,145 +12176,16 @@
               </a:defRPr>
             </a:pPr>
             <a:r>
-              <a:rPr sz="1725">
-                <a:solidFill>
-                  <a:srgbClr val="122033"/>
-                </a:solidFill>
-                <a:latin typeface="Malgun Gothic"/>
-                <a:ea typeface="Malgun Gothic"/>
-                <a:cs typeface="Malgun Gothic"/>
-              </a:rPr>
-              <a:t>프로젝트 요약과 팀 역할</a:t>
-            </a:r>
-          </a:p>
-          <a:p>
-            <a:pPr marL="228600" indent="-101600">
-              <a:spcAft>
-                <a:spcPts val="1200"/>
-              </a:spcAft>
-              <a:buChar char="•"/>
-              <a:defRPr sz="1725">
-                <a:solidFill>
-                  <a:srgbClr val="122033"/>
-                </a:solidFill>
-                <a:latin typeface="Malgun Gothic"/>
-                <a:ea typeface="Malgun Gothic"/>
-                <a:cs typeface="Malgun Gothic"/>
-              </a:defRPr>
-            </a:pPr>
-            <a:r>
-              <a:rPr sz="1725">
-                <a:solidFill>
-                  <a:srgbClr val="122033"/>
-                </a:solidFill>
-                <a:latin typeface="Malgun Gothic"/>
-                <a:ea typeface="Malgun Gothic"/>
-                <a:cs typeface="Malgun Gothic"/>
-              </a:rPr>
-              <a:t>데이터 범위와 품질 점검</a:t>
-            </a:r>
-          </a:p>
-          <a:p>
-            <a:pPr marL="228600" indent="-101600">
-              <a:spcAft>
-                <a:spcPts val="1200"/>
-              </a:spcAft>
-              <a:buChar char="•"/>
-              <a:defRPr sz="1725">
-                <a:solidFill>
-                  <a:srgbClr val="122033"/>
-                </a:solidFill>
-                <a:latin typeface="Malgun Gothic"/>
-                <a:ea typeface="Malgun Gothic"/>
-                <a:cs typeface="Malgun Gothic"/>
-              </a:defRPr>
-            </a:pPr>
-            <a:r>
-              <a:rPr sz="1725">
-                <a:solidFill>
-                  <a:srgbClr val="122033"/>
-                </a:solidFill>
-                <a:latin typeface="Malgun Gothic"/>
-                <a:ea typeface="Malgun Gothic"/>
-                <a:cs typeface="Malgun Gothic"/>
-              </a:rPr>
-              <a:t>전처리 설계와 실행 결과</a:t>
-            </a:r>
-          </a:p>
-          <a:p>
-            <a:pPr marL="228600" indent="-101600">
-              <a:spcAft>
-                <a:spcPts val="1200"/>
-              </a:spcAft>
-              <a:buChar char="•"/>
-              <a:defRPr sz="1725">
-                <a:solidFill>
-                  <a:srgbClr val="122033"/>
-                </a:solidFill>
-                <a:latin typeface="Malgun Gothic"/>
-                <a:ea typeface="Malgun Gothic"/>
-                <a:cs typeface="Malgun Gothic"/>
-              </a:defRPr>
-            </a:pPr>
-            <a:r>
-              <a:rPr sz="1725">
-                <a:solidFill>
-                  <a:srgbClr val="122033"/>
-                </a:solidFill>
-                <a:latin typeface="Malgun Gothic"/>
-                <a:ea typeface="Malgun Gothic"/>
-                <a:cs typeface="Malgun Gothic"/>
-              </a:rPr>
-              <a:t>입력 이미지 변환 전후</a:t>
-            </a:r>
-          </a:p>
-        </p:txBody>
-      </p:sp>
-      <p:sp>
-        <p:nvSpPr>
-          <p:cNvPr id="9" name="직사각형 8">
-            <a:extLst>
-              <a:ext uri="{FF2B5EF4-FFF2-40B4-BE49-F238E27FC236}">
-                <a16:creationId xmlns:a16="http://schemas.microsoft.com/office/drawing/2014/main" id="{18F0D364-E6AE-44DC-9A21-AFB3CCC0D511}"/>
-              </a:ext>
-            </a:extLst>
-          </p:cNvPr>
-          <p:cNvSpPr>
-            <a:spLocks noGrp="1"/>
-          </p:cNvSpPr>
-          <p:nvPr/>
-        </p:nvSpPr>
-        <p:spPr>
-          <a:xfrm>
-            <a:off x="6515100" y="2381250"/>
-            <a:ext cx="4762500" cy="2381250"/>
-          </a:xfrm>
-          <a:prstGeom prst="rect">
-            <a:avLst/>
-          </a:prstGeom>
-          <a:noFill/>
-          <a:ln w="0">
-            <a:noFill/>
-          </a:ln>
-        </p:spPr>
-        <p:txBody>
-          <a:bodyPr/>
-          <a:lstStyle/>
-          <a:p>
-            <a:pPr marL="228600" indent="-101600">
-              <a:spcAft>
-                <a:spcPts val="1200"/>
-              </a:spcAft>
-              <a:buChar char="•"/>
-              <a:defRPr sz="1725">
-                <a:solidFill>
-                  <a:srgbClr val="122033"/>
-                </a:solidFill>
-                <a:latin typeface="Malgun Gothic"/>
-                <a:ea typeface="Malgun Gothic"/>
-                <a:cs typeface="Malgun Gothic"/>
-              </a:defRPr>
-            </a:pPr>
+              <a:rPr sz="1725" dirty="0">
+                <a:solidFill>
+                  <a:srgbClr val="122033"/>
+                </a:solidFill>
+                <a:latin typeface="Malgun Gothic"/>
+                <a:ea typeface="Malgun Gothic"/>
+                <a:cs typeface="Malgun Gothic"/>
+              </a:rPr>
+              <a:t>팀 </a:t>
+            </a:r>
             <a:r>
               <a:rPr sz="1725" dirty="0" err="1">
                 <a:solidFill>
@@ -12324,32 +12195,10 @@
                 <a:ea typeface="Malgun Gothic"/>
                 <a:cs typeface="Malgun Gothic"/>
               </a:rPr>
-              <a:t>PyTorch</a:t>
-            </a:r>
-            <a:r>
-              <a:rPr sz="1725" dirty="0">
-                <a:solidFill>
-                  <a:srgbClr val="122033"/>
-                </a:solidFill>
-                <a:latin typeface="Malgun Gothic"/>
-                <a:ea typeface="Malgun Gothic"/>
-                <a:cs typeface="Malgun Gothic"/>
-              </a:rPr>
-              <a:t> GPU </a:t>
-            </a:r>
-            <a:r>
-              <a:rPr sz="1725" dirty="0" err="1">
-                <a:solidFill>
-                  <a:srgbClr val="122033"/>
-                </a:solidFill>
-                <a:latin typeface="Malgun Gothic"/>
-                <a:ea typeface="Malgun Gothic"/>
-                <a:cs typeface="Malgun Gothic"/>
-              </a:rPr>
-              <a:t>학습</a:t>
-            </a:r>
-            <a:r>
-              <a:rPr sz="1725" dirty="0">
+              <a:t>역할</a:t>
+            </a:r>
+            <a:r>
+              <a:rPr lang="en-US" altLang="ko-KR" sz="1725" dirty="0">
                 <a:solidFill>
                   <a:srgbClr val="122033"/>
                 </a:solidFill>
@@ -12360,15 +12209,15 @@
               <a:t> </a:t>
             </a:r>
             <a:r>
-              <a:rPr sz="1725" dirty="0" err="1">
-                <a:solidFill>
-                  <a:srgbClr val="122033"/>
-                </a:solidFill>
-                <a:latin typeface="Malgun Gothic"/>
-                <a:ea typeface="Malgun Gothic"/>
-                <a:cs typeface="Malgun Gothic"/>
-              </a:rPr>
-              <a:t>환경</a:t>
+              <a:rPr lang="ko-KR" altLang="en-US" sz="1725" dirty="0">
+                <a:solidFill>
+                  <a:srgbClr val="122033"/>
+                </a:solidFill>
+                <a:latin typeface="Malgun Gothic"/>
+                <a:ea typeface="Malgun Gothic"/>
+                <a:cs typeface="Malgun Gothic"/>
+              </a:rPr>
+              <a:t>소개</a:t>
             </a:r>
             <a:endParaRPr sz="1725" dirty="0">
               <a:solidFill>
@@ -12395,6 +12244,17 @@
               </a:defRPr>
             </a:pPr>
             <a:r>
+              <a:rPr sz="1725" dirty="0" err="1">
+                <a:solidFill>
+                  <a:srgbClr val="122033"/>
+                </a:solidFill>
+                <a:latin typeface="Malgun Gothic"/>
+                <a:ea typeface="Malgun Gothic"/>
+                <a:cs typeface="Malgun Gothic"/>
+              </a:rPr>
+              <a:t>데이터</a:t>
+            </a:r>
+            <a:r>
               <a:rPr sz="1725" dirty="0">
                 <a:solidFill>
                   <a:srgbClr val="122033"/>
@@ -12403,7 +12263,432 @@
                 <a:ea typeface="Malgun Gothic"/>
                 <a:cs typeface="Malgun Gothic"/>
               </a:rPr>
-              <a:t>세 </a:t>
+              <a:t> </a:t>
+            </a:r>
+            <a:r>
+              <a:rPr sz="1725" dirty="0" err="1">
+                <a:solidFill>
+                  <a:srgbClr val="122033"/>
+                </a:solidFill>
+                <a:latin typeface="Malgun Gothic"/>
+                <a:ea typeface="Malgun Gothic"/>
+                <a:cs typeface="Malgun Gothic"/>
+              </a:rPr>
+              <a:t>범위와</a:t>
+            </a:r>
+            <a:r>
+              <a:rPr sz="1725" dirty="0">
+                <a:solidFill>
+                  <a:srgbClr val="122033"/>
+                </a:solidFill>
+                <a:latin typeface="Malgun Gothic"/>
+                <a:ea typeface="Malgun Gothic"/>
+                <a:cs typeface="Malgun Gothic"/>
+              </a:rPr>
+              <a:t> </a:t>
+            </a:r>
+            <a:r>
+              <a:rPr sz="1725" dirty="0" err="1">
+                <a:solidFill>
+                  <a:srgbClr val="122033"/>
+                </a:solidFill>
+                <a:latin typeface="Malgun Gothic"/>
+                <a:ea typeface="Malgun Gothic"/>
+                <a:cs typeface="Malgun Gothic"/>
+              </a:rPr>
+              <a:t>품질</a:t>
+            </a:r>
+            <a:r>
+              <a:rPr sz="1725" dirty="0">
+                <a:solidFill>
+                  <a:srgbClr val="122033"/>
+                </a:solidFill>
+                <a:latin typeface="Malgun Gothic"/>
+                <a:ea typeface="Malgun Gothic"/>
+                <a:cs typeface="Malgun Gothic"/>
+              </a:rPr>
+              <a:t> </a:t>
+            </a:r>
+            <a:r>
+              <a:rPr sz="1725" dirty="0" err="1">
+                <a:solidFill>
+                  <a:srgbClr val="122033"/>
+                </a:solidFill>
+                <a:latin typeface="Malgun Gothic"/>
+                <a:ea typeface="Malgun Gothic"/>
+                <a:cs typeface="Malgun Gothic"/>
+              </a:rPr>
+              <a:t>점검</a:t>
+            </a:r>
+            <a:endParaRPr sz="1725" dirty="0">
+              <a:solidFill>
+                <a:srgbClr val="122033"/>
+              </a:solidFill>
+              <a:latin typeface="Malgun Gothic"/>
+              <a:ea typeface="Malgun Gothic"/>
+              <a:cs typeface="Malgun Gothic"/>
+            </a:endParaRPr>
+          </a:p>
+          <a:p>
+            <a:pPr marL="228600" indent="-101600">
+              <a:spcAft>
+                <a:spcPts val="1200"/>
+              </a:spcAft>
+              <a:buChar char="•"/>
+              <a:defRPr sz="1725">
+                <a:solidFill>
+                  <a:srgbClr val="122033"/>
+                </a:solidFill>
+                <a:latin typeface="Malgun Gothic"/>
+                <a:ea typeface="Malgun Gothic"/>
+                <a:cs typeface="Malgun Gothic"/>
+              </a:defRPr>
+            </a:pPr>
+            <a:r>
+              <a:rPr sz="1725" dirty="0" err="1">
+                <a:solidFill>
+                  <a:srgbClr val="122033"/>
+                </a:solidFill>
+                <a:latin typeface="Malgun Gothic"/>
+                <a:ea typeface="Malgun Gothic"/>
+                <a:cs typeface="Malgun Gothic"/>
+              </a:rPr>
+              <a:t>전처리</a:t>
+            </a:r>
+            <a:r>
+              <a:rPr sz="1725" dirty="0">
+                <a:solidFill>
+                  <a:srgbClr val="122033"/>
+                </a:solidFill>
+                <a:latin typeface="Malgun Gothic"/>
+                <a:ea typeface="Malgun Gothic"/>
+                <a:cs typeface="Malgun Gothic"/>
+              </a:rPr>
+              <a:t> </a:t>
+            </a:r>
+            <a:r>
+              <a:rPr sz="1725" dirty="0" err="1">
+                <a:solidFill>
+                  <a:srgbClr val="122033"/>
+                </a:solidFill>
+                <a:latin typeface="Malgun Gothic"/>
+                <a:ea typeface="Malgun Gothic"/>
+                <a:cs typeface="Malgun Gothic"/>
+              </a:rPr>
+              <a:t>설계와</a:t>
+            </a:r>
+            <a:r>
+              <a:rPr sz="1725" dirty="0">
+                <a:solidFill>
+                  <a:srgbClr val="122033"/>
+                </a:solidFill>
+                <a:latin typeface="Malgun Gothic"/>
+                <a:ea typeface="Malgun Gothic"/>
+                <a:cs typeface="Malgun Gothic"/>
+              </a:rPr>
+              <a:t> </a:t>
+            </a:r>
+            <a:r>
+              <a:rPr sz="1725" dirty="0" err="1">
+                <a:solidFill>
+                  <a:srgbClr val="122033"/>
+                </a:solidFill>
+                <a:latin typeface="Malgun Gothic"/>
+                <a:ea typeface="Malgun Gothic"/>
+                <a:cs typeface="Malgun Gothic"/>
+              </a:rPr>
+              <a:t>실행</a:t>
+            </a:r>
+            <a:r>
+              <a:rPr sz="1725" dirty="0">
+                <a:solidFill>
+                  <a:srgbClr val="122033"/>
+                </a:solidFill>
+                <a:latin typeface="Malgun Gothic"/>
+                <a:ea typeface="Malgun Gothic"/>
+                <a:cs typeface="Malgun Gothic"/>
+              </a:rPr>
+              <a:t> </a:t>
+            </a:r>
+            <a:r>
+              <a:rPr sz="1725" dirty="0" err="1">
+                <a:solidFill>
+                  <a:srgbClr val="122033"/>
+                </a:solidFill>
+                <a:latin typeface="Malgun Gothic"/>
+                <a:ea typeface="Malgun Gothic"/>
+                <a:cs typeface="Malgun Gothic"/>
+              </a:rPr>
+              <a:t>결과</a:t>
+            </a:r>
+            <a:endParaRPr sz="1725" dirty="0">
+              <a:solidFill>
+                <a:srgbClr val="122033"/>
+              </a:solidFill>
+              <a:latin typeface="Malgun Gothic"/>
+              <a:ea typeface="Malgun Gothic"/>
+              <a:cs typeface="Malgun Gothic"/>
+            </a:endParaRPr>
+          </a:p>
+          <a:p>
+            <a:pPr marL="228600" indent="-101600">
+              <a:spcAft>
+                <a:spcPts val="1200"/>
+              </a:spcAft>
+              <a:buChar char="•"/>
+              <a:defRPr sz="1725">
+                <a:solidFill>
+                  <a:srgbClr val="122033"/>
+                </a:solidFill>
+                <a:latin typeface="Malgun Gothic"/>
+                <a:ea typeface="Malgun Gothic"/>
+                <a:cs typeface="Malgun Gothic"/>
+              </a:defRPr>
+            </a:pPr>
+            <a:r>
+              <a:rPr sz="1725" dirty="0" err="1">
+                <a:solidFill>
+                  <a:srgbClr val="122033"/>
+                </a:solidFill>
+                <a:latin typeface="Malgun Gothic"/>
+                <a:ea typeface="Malgun Gothic"/>
+                <a:cs typeface="Malgun Gothic"/>
+              </a:rPr>
+              <a:t>입력</a:t>
+            </a:r>
+            <a:r>
+              <a:rPr sz="1725" dirty="0">
+                <a:solidFill>
+                  <a:srgbClr val="122033"/>
+                </a:solidFill>
+                <a:latin typeface="Malgun Gothic"/>
+                <a:ea typeface="Malgun Gothic"/>
+                <a:cs typeface="Malgun Gothic"/>
+              </a:rPr>
+              <a:t> </a:t>
+            </a:r>
+            <a:r>
+              <a:rPr sz="1725" dirty="0" err="1">
+                <a:solidFill>
+                  <a:srgbClr val="122033"/>
+                </a:solidFill>
+                <a:latin typeface="Malgun Gothic"/>
+                <a:ea typeface="Malgun Gothic"/>
+                <a:cs typeface="Malgun Gothic"/>
+              </a:rPr>
+              <a:t>이미지</a:t>
+            </a:r>
+            <a:r>
+              <a:rPr sz="1725" dirty="0">
+                <a:solidFill>
+                  <a:srgbClr val="122033"/>
+                </a:solidFill>
+                <a:latin typeface="Malgun Gothic"/>
+                <a:ea typeface="Malgun Gothic"/>
+                <a:cs typeface="Malgun Gothic"/>
+              </a:rPr>
+              <a:t> </a:t>
+            </a:r>
+            <a:r>
+              <a:rPr sz="1725" dirty="0" err="1">
+                <a:solidFill>
+                  <a:srgbClr val="122033"/>
+                </a:solidFill>
+                <a:latin typeface="Malgun Gothic"/>
+                <a:ea typeface="Malgun Gothic"/>
+                <a:cs typeface="Malgun Gothic"/>
+              </a:rPr>
+              <a:t>변환</a:t>
+            </a:r>
+            <a:r>
+              <a:rPr sz="1725" dirty="0">
+                <a:solidFill>
+                  <a:srgbClr val="122033"/>
+                </a:solidFill>
+                <a:latin typeface="Malgun Gothic"/>
+                <a:ea typeface="Malgun Gothic"/>
+                <a:cs typeface="Malgun Gothic"/>
+              </a:rPr>
+              <a:t> </a:t>
+            </a:r>
+            <a:r>
+              <a:rPr sz="1725" dirty="0" err="1">
+                <a:solidFill>
+                  <a:srgbClr val="122033"/>
+                </a:solidFill>
+                <a:latin typeface="Malgun Gothic"/>
+                <a:ea typeface="Malgun Gothic"/>
+                <a:cs typeface="Malgun Gothic"/>
+              </a:rPr>
+              <a:t>전후</a:t>
+            </a:r>
+            <a:endParaRPr sz="1725" dirty="0">
+              <a:solidFill>
+                <a:srgbClr val="122033"/>
+              </a:solidFill>
+              <a:latin typeface="Malgun Gothic"/>
+              <a:ea typeface="Malgun Gothic"/>
+              <a:cs typeface="Malgun Gothic"/>
+            </a:endParaRPr>
+          </a:p>
+        </p:txBody>
+      </p:sp>
+      <p:sp>
+        <p:nvSpPr>
+          <p:cNvPr id="9" name="직사각형 8">
+            <a:extLst>
+              <a:ext uri="{FF2B5EF4-FFF2-40B4-BE49-F238E27FC236}">
+                <a16:creationId xmlns:a16="http://schemas.microsoft.com/office/drawing/2014/main" id="{18F0D364-E6AE-44DC-9A21-AFB3CCC0D511}"/>
+              </a:ext>
+            </a:extLst>
+          </p:cNvPr>
+          <p:cNvSpPr>
+            <a:spLocks noGrp="1"/>
+          </p:cNvSpPr>
+          <p:nvPr/>
+        </p:nvSpPr>
+        <p:spPr>
+          <a:xfrm>
+            <a:off x="6515100" y="2381250"/>
+            <a:ext cx="4762500" cy="2381250"/>
+          </a:xfrm>
+          <a:prstGeom prst="rect">
+            <a:avLst/>
+          </a:prstGeom>
+          <a:noFill/>
+          <a:ln w="0">
+            <a:noFill/>
+          </a:ln>
+        </p:spPr>
+        <p:txBody>
+          <a:bodyPr/>
+          <a:lstStyle/>
+          <a:p>
+            <a:pPr marL="228600" indent="-101600">
+              <a:spcAft>
+                <a:spcPts val="1200"/>
+              </a:spcAft>
+              <a:buChar char="•"/>
+              <a:defRPr sz="1725">
+                <a:solidFill>
+                  <a:srgbClr val="122033"/>
+                </a:solidFill>
+                <a:latin typeface="Malgun Gothic"/>
+                <a:ea typeface="Malgun Gothic"/>
+                <a:cs typeface="Malgun Gothic"/>
+              </a:defRPr>
+            </a:pPr>
+            <a:r>
+              <a:rPr sz="1725" dirty="0" err="1">
+                <a:solidFill>
+                  <a:srgbClr val="122033"/>
+                </a:solidFill>
+                <a:latin typeface="Malgun Gothic"/>
+                <a:ea typeface="Malgun Gothic"/>
+                <a:cs typeface="Malgun Gothic"/>
+              </a:rPr>
+              <a:t>PyTorch</a:t>
+            </a:r>
+            <a:r>
+              <a:rPr sz="1725" dirty="0">
+                <a:solidFill>
+                  <a:srgbClr val="122033"/>
+                </a:solidFill>
+                <a:latin typeface="Malgun Gothic"/>
+                <a:ea typeface="Malgun Gothic"/>
+                <a:cs typeface="Malgun Gothic"/>
+              </a:rPr>
+              <a:t> GPU </a:t>
+            </a:r>
+            <a:r>
+              <a:rPr sz="1725" dirty="0" err="1">
+                <a:solidFill>
+                  <a:srgbClr val="122033"/>
+                </a:solidFill>
+                <a:latin typeface="Malgun Gothic"/>
+                <a:ea typeface="Malgun Gothic"/>
+                <a:cs typeface="Malgun Gothic"/>
+              </a:rPr>
+              <a:t>학습</a:t>
+            </a:r>
+            <a:r>
+              <a:rPr sz="1725" dirty="0">
+                <a:solidFill>
+                  <a:srgbClr val="122033"/>
+                </a:solidFill>
+                <a:latin typeface="Malgun Gothic"/>
+                <a:ea typeface="Malgun Gothic"/>
+                <a:cs typeface="Malgun Gothic"/>
+              </a:rPr>
+              <a:t> </a:t>
+            </a:r>
+            <a:r>
+              <a:rPr sz="1725" dirty="0" err="1">
+                <a:solidFill>
+                  <a:srgbClr val="122033"/>
+                </a:solidFill>
+                <a:latin typeface="Malgun Gothic"/>
+                <a:ea typeface="Malgun Gothic"/>
+                <a:cs typeface="Malgun Gothic"/>
+              </a:rPr>
+              <a:t>환경</a:t>
+            </a:r>
+            <a:endParaRPr sz="1725" dirty="0">
+              <a:solidFill>
+                <a:srgbClr val="122033"/>
+              </a:solidFill>
+              <a:latin typeface="Malgun Gothic"/>
+              <a:ea typeface="Malgun Gothic"/>
+              <a:cs typeface="Malgun Gothic"/>
+            </a:endParaRPr>
+          </a:p>
+          <a:p>
+            <a:pPr marL="228600" indent="-101600">
+              <a:spcAft>
+                <a:spcPts val="1200"/>
+              </a:spcAft>
+              <a:buChar char="•"/>
+              <a:defRPr sz="1725">
+                <a:solidFill>
+                  <a:srgbClr val="122033"/>
+                </a:solidFill>
+                <a:latin typeface="Malgun Gothic"/>
+                <a:ea typeface="Malgun Gothic"/>
+                <a:cs typeface="Malgun Gothic"/>
+              </a:defRPr>
+            </a:pPr>
+            <a:r>
+              <a:rPr sz="1725" dirty="0">
+                <a:solidFill>
+                  <a:srgbClr val="122033"/>
+                </a:solidFill>
+                <a:latin typeface="Malgun Gothic"/>
+                <a:ea typeface="Malgun Gothic"/>
+                <a:cs typeface="Malgun Gothic"/>
+              </a:rPr>
+              <a:t>세</a:t>
+            </a:r>
+            <a:r>
+              <a:rPr lang="ko-KR" altLang="en-US" sz="1725" dirty="0">
+                <a:solidFill>
+                  <a:srgbClr val="122033"/>
+                </a:solidFill>
+                <a:latin typeface="Malgun Gothic"/>
+                <a:ea typeface="Malgun Gothic"/>
+                <a:cs typeface="Malgun Gothic"/>
+              </a:rPr>
+              <a:t>개의</a:t>
+            </a:r>
+            <a:r>
+              <a:rPr sz="1725" dirty="0">
+                <a:solidFill>
+                  <a:srgbClr val="122033"/>
+                </a:solidFill>
+                <a:latin typeface="Malgun Gothic"/>
+                <a:ea typeface="Malgun Gothic"/>
+                <a:cs typeface="Malgun Gothic"/>
+              </a:rPr>
+              <a:t> </a:t>
             </a:r>
             <a:r>
               <a:rPr sz="1725" dirty="0" err="1">
